--- a/powerpoint/Presentasjon_Bystyret_Tertialrapport_2026.pptx
+++ b/powerpoint/Presentasjon_Bystyret_Tertialrapport_2026.pptx
@@ -3252,7 +3252,7 @@
               </a:defRPr>
             </a:pPr>
             <a:r>
-              <a:t>Kommune-Audit Stempel (SHA-256): c31a19ca155fb2d0bc474c9e...  |  Hjemmel: Kommuneloven § 14-5</a:t>
+              <a:t>Kommune-Audit Stempel (SHA-256): 4c0531b485a4529a89e1ebd9...  |  Hjemmel: Kommuneloven § 14-5</a:t>
             </a:r>
           </a:p>
         </p:txBody>
@@ -3781,7 +3781,7 @@
               </a:defRPr>
             </a:pPr>
             <a:r>
-              <a:t>Kristiansand kommune | Økonomi &amp; Virksomhetsstyring  •  Audit ID: c31a19ca155f  •  Side 2 av 7</a:t>
+              <a:t>Kristiansand kommune | Økonomi &amp; Virksomhetsstyring  •  Audit ID: 4c0531b485a4  •  Side 2 av 7</a:t>
             </a:r>
           </a:p>
         </p:txBody>
@@ -4523,7 +4523,7 @@
               </a:defRPr>
             </a:pPr>
             <a:r>
-              <a:t>Kristiansand kommune | Økonomi &amp; Virksomhetsstyring  •  Audit ID: c31a19ca155f  •  Side 3 av 7</a:t>
+              <a:t>Kristiansand kommune | Økonomi &amp; Virksomhetsstyring  •  Audit ID: 4c0531b485a4  •  Side 3 av 7</a:t>
             </a:r>
           </a:p>
         </p:txBody>
@@ -5184,7 +5184,7 @@
               </a:defRPr>
             </a:pPr>
             <a:r>
-              <a:t>Kristiansand kommune | Økonomi &amp; Virksomhetsstyring  •  Audit ID: c31a19ca155f  •  Side 4 av 7</a:t>
+              <a:t>Kristiansand kommune | Økonomi &amp; Virksomhetsstyring  •  Audit ID: 4c0531b485a4  •  Side 4 av 7</a:t>
             </a:r>
           </a:p>
         </p:txBody>
@@ -5553,7 +5553,7 @@
               </a:defRPr>
             </a:pPr>
             <a:r>
-              <a:t>Kristiansand kommune | Økonomi &amp; Virksomhetsstyring  •  Audit ID: c31a19ca155f  •  Side 5 av 7</a:t>
+              <a:t>Kristiansand kommune | Økonomi &amp; Virksomhetsstyring  •  Audit ID: 4c0531b485a4  •  Side 5 av 7</a:t>
             </a:r>
           </a:p>
         </p:txBody>
@@ -5901,7 +5901,7 @@
               </a:defRPr>
             </a:pPr>
             <a:r>
-              <a:t>Kristiansand kommune | Økonomi &amp; Virksomhetsstyring  •  Audit ID: c31a19ca155f  •  Side 6 av 7</a:t>
+              <a:t>Kristiansand kommune | Økonomi &amp; Virksomhetsstyring  •  Audit ID: 4c0531b485a4  •  Side 6 av 7</a:t>
             </a:r>
           </a:p>
         </p:txBody>
@@ -6136,7 +6136,7 @@
               </a:defRPr>
             </a:pPr>
             <a:r>
-              <a:t>Kristiansand kommune | Økonomi &amp; Virksomhetsstyring  •  Audit ID: c31a19ca155f  •  Side 7 av 7</a:t>
+              <a:t>Kristiansand kommune | Økonomi &amp; Virksomhetsstyring  •  Audit ID: 4c0531b485a4  •  Side 7 av 7</a:t>
             </a:r>
           </a:p>
         </p:txBody>

--- a/powerpoint/Presentasjon_Bystyret_Tertialrapport_2026.pptx
+++ b/powerpoint/Presentasjon_Bystyret_Tertialrapport_2026.pptx
@@ -3237,7 +3237,7 @@
               </a:defRPr>
             </a:pPr>
             <a:r>
-              <a:t>Saksbehandler: Frank Ellingsen, Senior Controller  |  Møte: Bystyret / Formannskapet  |  Dato: 14.10.2026</a:t>
+              <a:t>Saksbehandler: Frank Ellingsen, Senior Controller  |  Møte: Bystyret / Formannskapet  |  Dato: 17.10.2026</a:t>
             </a:r>
           </a:p>
           <a:p>
@@ -3252,7 +3252,7 @@
               </a:defRPr>
             </a:pPr>
             <a:r>
-              <a:t>Kommune-Audit Stempel (SHA-256): 4c0531b485a4529a89e1ebd9...  |  Hjemmel: Kommuneloven § 14-5</a:t>
+              <a:t>Kommune-Audit Stempel (SHA-256): 0859f1c3861f214498a8dca1...  |  Hjemmel: Kommuneloven § 14-5</a:t>
             </a:r>
           </a:p>
         </p:txBody>
@@ -3402,7 +3402,7 @@
               </a:defRPr>
             </a:pPr>
             <a:r>
-              <a:t>YTD MERFORBRUK</a:t>
+              <a:t>YTD AVVIK (MERFORBRUK)</a:t>
             </a:r>
           </a:p>
           <a:p>
@@ -3417,7 +3417,7 @@
               </a:defRPr>
             </a:pPr>
             <a:r>
-              <a:t>+850 000 kr</a:t>
+              <a:t>-850 000 kr</a:t>
             </a:r>
           </a:p>
           <a:p>
@@ -3432,7 +3432,7 @@
               </a:defRPr>
             </a:pPr>
             <a:r>
-              <a:t>+12,4 % over budsjettramme Q2</a:t>
+              <a:t>-12,4 % mot budsjettramme Q2</a:t>
             </a:r>
           </a:p>
         </p:txBody>
@@ -3781,7 +3781,7 @@
               </a:defRPr>
             </a:pPr>
             <a:r>
-              <a:t>Kristiansand kommune | Økonomi &amp; Virksomhetsstyring  •  Audit ID: 4c0531b485a4  •  Side 2 av 7</a:t>
+              <a:t>Kristiansand kommune | Økonomi &amp; Virksomhetsstyring  •  Audit ID: 0859f1c3861f  •  Side 2 av 7</a:t>
             </a:r>
           </a:p>
         </p:txBody>
@@ -4070,13 +4070,13 @@
                       <a:pPr algn="r">
                         <a:defRPr sz="1100" b="1">
                           <a:solidFill>
-                            <a:srgbClr val="1F2937"/>
+                            <a:srgbClr val="DC2626"/>
                           </a:solidFill>
                           <a:latin typeface="Arial"/>
                         </a:defRPr>
                       </a:pPr>
                       <a:r>
-                        <a:t>+40 000 kr</a:t>
+                        <a:t>-40 000 kr</a:t>
                       </a:r>
                     </a:p>
                   </a:txBody>
@@ -4097,7 +4097,7 @@
                         </a:defRPr>
                       </a:pPr>
                       <a:r>
-                        <a:t>+0,8 %</a:t>
+                        <a:t>-0,8 %</a:t>
                       </a:r>
                     </a:p>
                   </a:txBody>
@@ -4186,7 +4186,7 @@
                         </a:defRPr>
                       </a:pPr>
                       <a:r>
-                        <a:t>+620 000 kr</a:t>
+                        <a:t>-620 000 kr</a:t>
                       </a:r>
                     </a:p>
                   </a:txBody>
@@ -4207,7 +4207,7 @@
                         </a:defRPr>
                       </a:pPr>
                       <a:r>
-                        <a:t>+51,7 %</a:t>
+                        <a:t>-51,7 %</a:t>
                       </a:r>
                     </a:p>
                   </a:txBody>
@@ -4296,7 +4296,7 @@
                         </a:defRPr>
                       </a:pPr>
                       <a:r>
-                        <a:t>+379 000 kr</a:t>
+                        <a:t>-379 000 kr</a:t>
                       </a:r>
                     </a:p>
                   </a:txBody>
@@ -4317,7 +4317,7 @@
                         </a:defRPr>
                       </a:pPr>
                       <a:r>
-                        <a:t>+664,9 %</a:t>
+                        <a:t>-664,9 %</a:t>
                       </a:r>
                     </a:p>
                   </a:txBody>
@@ -4406,7 +4406,7 @@
                         </a:defRPr>
                       </a:pPr>
                       <a:r>
-                        <a:t>+180 000 kr</a:t>
+                        <a:t>-180 000 kr</a:t>
                       </a:r>
                     </a:p>
                   </a:txBody>
@@ -4472,7 +4472,7 @@
               </a:defRPr>
             </a:pPr>
             <a:r>
-              <a:t>Totalt Enhet 202 Grunnskole: Budsjett kr 6 850 000  |  Faktisk kr 7 700 000  |  Avvik: +850 000 kr (+12,4 %)</a:t>
+              <a:t>Totalt Enhet 202 Grunnskole: Budsjett kr 6 850 000  |  Faktisk kr 7 700 000  |  Avvik: -850 000 kr (-12,4 %)</a:t>
             </a:r>
           </a:p>
           <a:p>
@@ -4523,7 +4523,7 @@
               </a:defRPr>
             </a:pPr>
             <a:r>
-              <a:t>Kristiansand kommune | Økonomi &amp; Virksomhetsstyring  •  Audit ID: 4c0531b485a4  •  Side 3 av 7</a:t>
+              <a:t>Kristiansand kommune | Økonomi &amp; Virksomhetsstyring  •  Audit ID: 0859f1c3861f  •  Side 3 av 7</a:t>
             </a:r>
           </a:p>
         </p:txBody>
@@ -5184,7 +5184,7 @@
               </a:defRPr>
             </a:pPr>
             <a:r>
-              <a:t>Kristiansand kommune | Økonomi &amp; Virksomhetsstyring  •  Audit ID: 4c0531b485a4  •  Side 4 av 7</a:t>
+              <a:t>Kristiansand kommune | Økonomi &amp; Virksomhetsstyring  •  Audit ID: 0859f1c3861f  •  Side 4 av 7</a:t>
             </a:r>
           </a:p>
         </p:txBody>
@@ -5553,7 +5553,7 @@
               </a:defRPr>
             </a:pPr>
             <a:r>
-              <a:t>Kristiansand kommune | Økonomi &amp; Virksomhetsstyring  •  Audit ID: 4c0531b485a4  •  Side 5 av 7</a:t>
+              <a:t>Kristiansand kommune | Økonomi &amp; Virksomhetsstyring  •  Audit ID: 0859f1c3861f  •  Side 5 av 7</a:t>
             </a:r>
           </a:p>
         </p:txBody>
@@ -5901,7 +5901,7 @@
               </a:defRPr>
             </a:pPr>
             <a:r>
-              <a:t>Kristiansand kommune | Økonomi &amp; Virksomhetsstyring  •  Audit ID: 4c0531b485a4  •  Side 6 av 7</a:t>
+              <a:t>Kristiansand kommune | Økonomi &amp; Virksomhetsstyring  •  Audit ID: 0859f1c3861f  •  Side 6 av 7</a:t>
             </a:r>
           </a:p>
         </p:txBody>
@@ -6100,7 +6100,7 @@
               </a:defRPr>
             </a:pPr>
             <a:r>
-              <a:t>Kristiansand, 14.10.2026  •  Camilla Dunsæd, Kommunedirektør  /  Frank Ellingsen, Senior Controller</a:t>
+              <a:t>Kristiansand, 17.10.2026  •  Camilla Dunsæd, Kommunedirektør  /  Frank Ellingsen, Senior Controller</a:t>
             </a:r>
           </a:p>
         </p:txBody>
@@ -6136,7 +6136,7 @@
               </a:defRPr>
             </a:pPr>
             <a:r>
-              <a:t>Kristiansand kommune | Økonomi &amp; Virksomhetsstyring  •  Audit ID: 4c0531b485a4  •  Side 7 av 7</a:t>
+              <a:t>Kristiansand kommune | Økonomi &amp; Virksomhetsstyring  •  Audit ID: 0859f1c3861f  •  Side 7 av 7</a:t>
             </a:r>
           </a:p>
         </p:txBody>
